--- a/MediScan_AI_Presentation.pptx
+++ b/MediScan_AI_Presentation.pptx
@@ -3158,7 +3158,7 @@
           </a:p>
           <a:p>
             <a:r>
-              <a:t>VCE ML Hackathon 2026</a:t>
+              <a:t>VVCE ML Hackathon 2026</a:t>
             </a:r>
           </a:p>
         </p:txBody>
